--- a/classes/parte-4-seguridad-de-aplicaciones-web/087-owasp-top-10-panorama-general/clase-087-presentacion.pptx
+++ b/classes/parte-4-seguridad-de-aplicaciones-web/087-owasp-top-10-panorama-general/clase-087-presentacion.pptx
@@ -17,6 +17,9 @@
     <p:sldId id="265" r:id="rId16"/>
     <p:sldId id="266" r:id="rId17"/>
     <p:sldId id="267" r:id="rId18"/>
+    <p:sldId id="268" r:id="rId19"/>
+    <p:sldId id="269" r:id="rId20"/>
+    <p:sldId id="270" r:id="rId21"/>
   </p:sldIdLst>
   <p:sldSz cx="9144000" cy="6858000" type="screen4x3"/>
   <p:notesSz cx="6858000" cy="9144000"/>
@@ -3198,7 +3201,7 @@
                   <a:srgbClr val="0B3D2E"/>
                 </a:solidFill>
               </a:rPr>
-              <a:t>⚠️ Errores comunes</a:t>
+              <a:t>✍️ Ejercicios</a:t>
             </a:r>
           </a:p>
         </p:txBody>
@@ -3236,67 +3239,82 @@
                   <a:srgbClr val="22282E"/>
                 </a:solidFill>
               </a:rPr>
-              <a:t>•  Tratar el Top 10 como checklist completa — Es concienciación; usa ASVS/WSTG para cobertura</a:t>
-            </a:r>
-          </a:p>
-          <a:p>
-            <a:pPr>
-              <a:spcAft>
-                <a:spcPts val="600"/>
-              </a:spcAft>
-            </a:pPr>
-            <a:r>
-              <a:rPr sz="1500">
-                <a:solidFill>
-                  <a:srgbClr val="22282E"/>
-                </a:solidFill>
-              </a:rPr>
-              <a:t>•  Confundir categoría con vulnerabilidad — Una categoría agrupa muchas CWE</a:t>
-            </a:r>
-          </a:p>
-          <a:p>
-            <a:pPr>
-              <a:spcAft>
-                <a:spcPts val="600"/>
-              </a:spcAft>
-            </a:pPr>
-            <a:r>
-              <a:rPr sz="1500">
-                <a:solidFill>
-                  <a:srgbClr val="22282E"/>
-                </a:solidFill>
-              </a:rPr>
-              <a:t>•  Ignorar A04 por ser "abstracta" — El diseño inseguro es causa de muchos bugs</a:t>
-            </a:r>
-          </a:p>
-          <a:p>
-            <a:pPr>
-              <a:spcAft>
-                <a:spcPts val="600"/>
-              </a:spcAft>
-            </a:pPr>
-            <a:r>
-              <a:rPr sz="1500">
-                <a:solidFill>
-                  <a:srgbClr val="22282E"/>
-                </a:solidFill>
-              </a:rPr>
-              <a:t>•  Priorizar solo por moda — Prioriza por riesgo en tu contexto</a:t>
-            </a:r>
-          </a:p>
-          <a:p>
-            <a:pPr>
-              <a:spcAft>
-                <a:spcPts val="600"/>
-              </a:spcAft>
-            </a:pPr>
-            <a:r>
-              <a:rPr sz="1500">
-                <a:solidFill>
-                  <a:srgbClr val="22282E"/>
-                </a:solidFill>
-              </a:rPr>
-              <a:t>•  Usar la versión 2017 — Cambió el orden y las categorías; usa 2021</a:t>
+              <a:t>•  Asocia cada una de estas CWE a su categoría: CWE-89, CWE-79, CWE-352, CWE-918, CWE-611.</a:t>
+            </a:r>
+          </a:p>
+          <a:p>
+            <a:pPr>
+              <a:spcAft>
+                <a:spcPts val="600"/>
+              </a:spcAft>
+            </a:pPr>
+            <a:r>
+              <a:rPr sz="1500">
+                <a:solidFill>
+                  <a:srgbClr val="22282E"/>
+                </a:solidFill>
+              </a:rPr>
+              <a:t>•  Explica por qué "Injection" absorbió a XSS en 2021.</a:t>
+            </a:r>
+          </a:p>
+          <a:p>
+            <a:pPr>
+              <a:spcAft>
+                <a:spcPts val="600"/>
+              </a:spcAft>
+            </a:pPr>
+            <a:r>
+              <a:rPr sz="1500">
+                <a:solidFill>
+                  <a:srgbClr val="22282E"/>
+                </a:solidFill>
+              </a:rPr>
+              <a:t>•  Da un ejemplo propio de Insecure Design que no sea un bug de código.</a:t>
+            </a:r>
+          </a:p>
+          <a:p>
+            <a:pPr>
+              <a:spcAft>
+                <a:spcPts val="600"/>
+              </a:spcAft>
+            </a:pPr>
+            <a:r>
+              <a:rPr sz="1500">
+                <a:solidFill>
+                  <a:srgbClr val="22282E"/>
+                </a:solidFill>
+              </a:rPr>
+              <a:t>•  Diferencia A05 (misconfiguration) de A06 (componentes vulnerables) con un caso.</a:t>
+            </a:r>
+          </a:p>
+          <a:p>
+            <a:pPr>
+              <a:spcAft>
+                <a:spcPts val="600"/>
+              </a:spcAft>
+            </a:pPr>
+            <a:r>
+              <a:rPr sz="1500">
+                <a:solidFill>
+                  <a:srgbClr val="22282E"/>
+                </a:solidFill>
+              </a:rPr>
+              <a:t>•  Justifica por qué Broken Access Control encabeza la lista.</a:t>
+            </a:r>
+          </a:p>
+          <a:p>
+            <a:pPr>
+              <a:spcAft>
+                <a:spcPts val="600"/>
+              </a:spcAft>
+            </a:pPr>
+            <a:r>
+              <a:rPr sz="1500">
+                <a:solidFill>
+                  <a:srgbClr val="22282E"/>
+                </a:solidFill>
+              </a:rPr>
+              <a:t>•  Propón un control preventivo para cada categoría del Top 10.</a:t>
             </a:r>
           </a:p>
         </p:txBody>
@@ -3347,7 +3365,7 @@
                   <a:srgbClr val="0B3D2E"/>
                 </a:solidFill>
               </a:rPr>
-              <a:t>❓ Preguntas frecuentes</a:t>
+              <a:t>📝 Reto verificable</a:t>
             </a:r>
           </a:p>
         </p:txBody>
@@ -3385,82 +3403,22 @@
                   <a:srgbClr val="22282E"/>
                 </a:solidFill>
               </a:rPr>
-              <a:t>•  ❓ ¿El Top 10 basta para certificar seguridad?</a:t>
-            </a:r>
-          </a:p>
-          <a:p>
-            <a:pPr>
-              <a:spcAft>
-                <a:spcPts val="600"/>
-              </a:spcAft>
-            </a:pPr>
-            <a:r>
-              <a:rPr sz="1500">
-                <a:solidFill>
-                  <a:srgbClr val="22282E"/>
-                </a:solidFill>
-              </a:rPr>
-              <a:t>•  No. Es concienciación. Para verificación usa OWASP ASVS y para testing la WSTG.</a:t>
-            </a:r>
-          </a:p>
-          <a:p>
-            <a:pPr>
-              <a:spcAft>
-                <a:spcPts val="600"/>
-              </a:spcAft>
-            </a:pPr>
-            <a:r>
-              <a:rPr sz="1500">
-                <a:solidFill>
-                  <a:srgbClr val="22282E"/>
-                </a:solidFill>
-              </a:rPr>
-              <a:t>•  ❓ ¿Con qué frecuencia cambia?</a:t>
-            </a:r>
-          </a:p>
-          <a:p>
-            <a:pPr>
-              <a:spcAft>
-                <a:spcPts val="600"/>
-              </a:spcAft>
-            </a:pPr>
-            <a:r>
-              <a:rPr sz="1500">
-                <a:solidFill>
-                  <a:srgbClr val="22282E"/>
-                </a:solidFill>
-              </a:rPr>
-              <a:t>•  Cada 3–4 años aproximadamente, según datos de la industria y encuestas.</a:t>
-            </a:r>
-          </a:p>
-          <a:p>
-            <a:pPr>
-              <a:spcAft>
-                <a:spcPts val="600"/>
-              </a:spcAft>
-            </a:pPr>
-            <a:r>
-              <a:rPr sz="1500">
-                <a:solidFill>
-                  <a:srgbClr val="22282E"/>
-                </a:solidFill>
-              </a:rPr>
-              <a:t>•  ❓ ¿Dónde encaja XSS ahora?</a:t>
-            </a:r>
-          </a:p>
-          <a:p>
-            <a:pPr>
-              <a:spcAft>
-                <a:spcPts val="600"/>
-              </a:spcAft>
-            </a:pPr>
-            <a:r>
-              <a:rPr sz="1500">
-                <a:solidFill>
-                  <a:srgbClr val="22282E"/>
-                </a:solidFill>
-              </a:rPr>
-              <a:t>•  Dentro de A03 Injection desde 2021, porque comparte causa raíz: datos no confiables interpretados como código.</a:t>
+              <a:t>•  Entrega una matriz Top 10 con las 10 categorías, un ejemplo concreto por cada una, su CWE principal y un control de mitigación.</a:t>
+            </a:r>
+          </a:p>
+          <a:p>
+            <a:pPr>
+              <a:spcAft>
+                <a:spcPts val="600"/>
+              </a:spcAft>
+            </a:pPr>
+            <a:r>
+              <a:rPr sz="1500">
+                <a:solidFill>
+                  <a:srgbClr val="22282E"/>
+                </a:solidFill>
+              </a:rPr>
+              <a:t>•  Criterio de aceptación: las 10 categorías están cubiertas, los ejemplos son distintos y realistas, y cada control mitiga la causa raíz (no solo el síntoma).</a:t>
             </a:r>
           </a:p>
         </p:txBody>
@@ -3511,7 +3469,7 @@
                   <a:srgbClr val="0B3D2E"/>
                 </a:solidFill>
               </a:rPr>
-              <a:t>🔗 Referencias</a:t>
+              <a:t>⚠️ Errores comunes</a:t>
             </a:r>
           </a:p>
         </p:txBody>
@@ -3549,6 +3507,319 @@
                   <a:srgbClr val="22282E"/>
                 </a:solidFill>
               </a:rPr>
+              <a:t>•  Tratar el Top 10 como checklist completa — Es concienciación; usa ASVS/WSTG para cobertura</a:t>
+            </a:r>
+          </a:p>
+          <a:p>
+            <a:pPr>
+              <a:spcAft>
+                <a:spcPts val="600"/>
+              </a:spcAft>
+            </a:pPr>
+            <a:r>
+              <a:rPr sz="1500">
+                <a:solidFill>
+                  <a:srgbClr val="22282E"/>
+                </a:solidFill>
+              </a:rPr>
+              <a:t>•  Confundir categoría con vulnerabilidad — Una categoría agrupa muchas CWE</a:t>
+            </a:r>
+          </a:p>
+          <a:p>
+            <a:pPr>
+              <a:spcAft>
+                <a:spcPts val="600"/>
+              </a:spcAft>
+            </a:pPr>
+            <a:r>
+              <a:rPr sz="1500">
+                <a:solidFill>
+                  <a:srgbClr val="22282E"/>
+                </a:solidFill>
+              </a:rPr>
+              <a:t>•  Ignorar A04 por ser "abstracta" — El diseño inseguro es causa de muchos bugs</a:t>
+            </a:r>
+          </a:p>
+          <a:p>
+            <a:pPr>
+              <a:spcAft>
+                <a:spcPts val="600"/>
+              </a:spcAft>
+            </a:pPr>
+            <a:r>
+              <a:rPr sz="1500">
+                <a:solidFill>
+                  <a:srgbClr val="22282E"/>
+                </a:solidFill>
+              </a:rPr>
+              <a:t>•  Priorizar solo por moda — Prioriza por riesgo en tu contexto</a:t>
+            </a:r>
+          </a:p>
+          <a:p>
+            <a:pPr>
+              <a:spcAft>
+                <a:spcPts val="600"/>
+              </a:spcAft>
+            </a:pPr>
+            <a:r>
+              <a:rPr sz="1500">
+                <a:solidFill>
+                  <a:srgbClr val="22282E"/>
+                </a:solidFill>
+              </a:rPr>
+              <a:t>•  Usar la versión 2017 — Cambió el orden y las categorías; usa 2021</a:t>
+            </a:r>
+          </a:p>
+        </p:txBody>
+      </p:sp>
+    </p:spTree>
+  </p:cSld>
+  <p:clrMapOvr>
+    <a:masterClrMapping/>
+  </p:clrMapOvr>
+</p:sld>
+</file>
+
+<file path=ppt/slides/slide13.xml><?xml version="1.0" encoding="utf-8"?>
+<p:sld xmlns:a="http://schemas.openxmlformats.org/drawingml/2006/main" xmlns:p="http://schemas.openxmlformats.org/presentationml/2006/main" xmlns:r="http://schemas.openxmlformats.org/officeDocument/2006/relationships">
+  <p:cSld>
+    <p:spTree>
+      <p:nvGrpSpPr>
+        <p:cNvPr id="1" name=""/>
+        <p:cNvGrpSpPr/>
+        <p:nvPr/>
+      </p:nvGrpSpPr>
+      <p:grpSpPr/>
+      <p:sp>
+        <p:nvSpPr>
+          <p:cNvPr id="2" name="TextBox 1"/>
+          <p:cNvSpPr txBox="1"/>
+          <p:nvPr/>
+        </p:nvSpPr>
+        <p:spPr>
+          <a:xfrm>
+            <a:off x="457200" y="320040"/>
+            <a:ext cx="8229600" cy="822960"/>
+          </a:xfrm>
+          <a:prstGeom prst="rect">
+            <a:avLst/>
+          </a:prstGeom>
+          <a:noFill/>
+        </p:spPr>
+        <p:txBody>
+          <a:bodyPr wrap="square">
+            <a:spAutoFit/>
+          </a:bodyPr>
+          <a:lstStyle/>
+          <a:p>
+            <a:r>
+              <a:rPr sz="2600" b="1">
+                <a:solidFill>
+                  <a:srgbClr val="0B3D2E"/>
+                </a:solidFill>
+              </a:rPr>
+              <a:t>❓ Preguntas frecuentes</a:t>
+            </a:r>
+          </a:p>
+        </p:txBody>
+      </p:sp>
+      <p:sp>
+        <p:nvSpPr>
+          <p:cNvPr id="3" name="TextBox 2"/>
+          <p:cNvSpPr txBox="1"/>
+          <p:nvPr/>
+        </p:nvSpPr>
+        <p:spPr>
+          <a:xfrm>
+            <a:off x="457200" y="1280160"/>
+            <a:ext cx="8229600" cy="4937760"/>
+          </a:xfrm>
+          <a:prstGeom prst="rect">
+            <a:avLst/>
+          </a:prstGeom>
+          <a:noFill/>
+        </p:spPr>
+        <p:txBody>
+          <a:bodyPr wrap="square">
+            <a:spAutoFit/>
+          </a:bodyPr>
+          <a:lstStyle/>
+          <a:p>
+            <a:pPr>
+              <a:spcAft>
+                <a:spcPts val="600"/>
+              </a:spcAft>
+            </a:pPr>
+            <a:r>
+              <a:rPr sz="1500">
+                <a:solidFill>
+                  <a:srgbClr val="22282E"/>
+                </a:solidFill>
+              </a:rPr>
+              <a:t>•  ❓ ¿El Top 10 basta para certificar seguridad?</a:t>
+            </a:r>
+          </a:p>
+          <a:p>
+            <a:pPr>
+              <a:spcAft>
+                <a:spcPts val="600"/>
+              </a:spcAft>
+            </a:pPr>
+            <a:r>
+              <a:rPr sz="1500">
+                <a:solidFill>
+                  <a:srgbClr val="22282E"/>
+                </a:solidFill>
+              </a:rPr>
+              <a:t>•  No. Es concienciación. Para verificación usa OWASP ASVS y para testing la WSTG.</a:t>
+            </a:r>
+          </a:p>
+          <a:p>
+            <a:pPr>
+              <a:spcAft>
+                <a:spcPts val="600"/>
+              </a:spcAft>
+            </a:pPr>
+            <a:r>
+              <a:rPr sz="1500">
+                <a:solidFill>
+                  <a:srgbClr val="22282E"/>
+                </a:solidFill>
+              </a:rPr>
+              <a:t>•  ❓ ¿Con qué frecuencia cambia?</a:t>
+            </a:r>
+          </a:p>
+          <a:p>
+            <a:pPr>
+              <a:spcAft>
+                <a:spcPts val="600"/>
+              </a:spcAft>
+            </a:pPr>
+            <a:r>
+              <a:rPr sz="1500">
+                <a:solidFill>
+                  <a:srgbClr val="22282E"/>
+                </a:solidFill>
+              </a:rPr>
+              <a:t>•  Cada 3–4 años aproximadamente, según datos de la industria y encuestas.</a:t>
+            </a:r>
+          </a:p>
+          <a:p>
+            <a:pPr>
+              <a:spcAft>
+                <a:spcPts val="600"/>
+              </a:spcAft>
+            </a:pPr>
+            <a:r>
+              <a:rPr sz="1500">
+                <a:solidFill>
+                  <a:srgbClr val="22282E"/>
+                </a:solidFill>
+              </a:rPr>
+              <a:t>•  ❓ ¿Dónde encaja XSS ahora?</a:t>
+            </a:r>
+          </a:p>
+          <a:p>
+            <a:pPr>
+              <a:spcAft>
+                <a:spcPts val="600"/>
+              </a:spcAft>
+            </a:pPr>
+            <a:r>
+              <a:rPr sz="1500">
+                <a:solidFill>
+                  <a:srgbClr val="22282E"/>
+                </a:solidFill>
+              </a:rPr>
+              <a:t>•  Dentro de A03 Injection desde 2021, porque comparte causa raíz: datos no confiables interpretados como código.</a:t>
+            </a:r>
+          </a:p>
+        </p:txBody>
+      </p:sp>
+    </p:spTree>
+  </p:cSld>
+  <p:clrMapOvr>
+    <a:masterClrMapping/>
+  </p:clrMapOvr>
+</p:sld>
+</file>
+
+<file path=ppt/slides/slide14.xml><?xml version="1.0" encoding="utf-8"?>
+<p:sld xmlns:a="http://schemas.openxmlformats.org/drawingml/2006/main" xmlns:p="http://schemas.openxmlformats.org/presentationml/2006/main" xmlns:r="http://schemas.openxmlformats.org/officeDocument/2006/relationships">
+  <p:cSld>
+    <p:spTree>
+      <p:nvGrpSpPr>
+        <p:cNvPr id="1" name=""/>
+        <p:cNvGrpSpPr/>
+        <p:nvPr/>
+      </p:nvGrpSpPr>
+      <p:grpSpPr/>
+      <p:sp>
+        <p:nvSpPr>
+          <p:cNvPr id="2" name="TextBox 1"/>
+          <p:cNvSpPr txBox="1"/>
+          <p:nvPr/>
+        </p:nvSpPr>
+        <p:spPr>
+          <a:xfrm>
+            <a:off x="457200" y="320040"/>
+            <a:ext cx="8229600" cy="822960"/>
+          </a:xfrm>
+          <a:prstGeom prst="rect">
+            <a:avLst/>
+          </a:prstGeom>
+          <a:noFill/>
+        </p:spPr>
+        <p:txBody>
+          <a:bodyPr wrap="square">
+            <a:spAutoFit/>
+          </a:bodyPr>
+          <a:lstStyle/>
+          <a:p>
+            <a:r>
+              <a:rPr sz="2600" b="1">
+                <a:solidFill>
+                  <a:srgbClr val="0B3D2E"/>
+                </a:solidFill>
+              </a:rPr>
+              <a:t>🔗 Referencias</a:t>
+            </a:r>
+          </a:p>
+        </p:txBody>
+      </p:sp>
+      <p:sp>
+        <p:nvSpPr>
+          <p:cNvPr id="3" name="TextBox 2"/>
+          <p:cNvSpPr txBox="1"/>
+          <p:nvPr/>
+        </p:nvSpPr>
+        <p:spPr>
+          <a:xfrm>
+            <a:off x="457200" y="1280160"/>
+            <a:ext cx="8229600" cy="4937760"/>
+          </a:xfrm>
+          <a:prstGeom prst="rect">
+            <a:avLst/>
+          </a:prstGeom>
+          <a:noFill/>
+        </p:spPr>
+        <p:txBody>
+          <a:bodyPr wrap="square">
+            <a:spAutoFit/>
+          </a:bodyPr>
+          <a:lstStyle/>
+          <a:p>
+            <a:pPr>
+              <a:spcAft>
+                <a:spcPts val="600"/>
+              </a:spcAft>
+            </a:pPr>
+            <a:r>
+              <a:rPr sz="1500">
+                <a:solidFill>
+                  <a:srgbClr val="22282E"/>
+                </a:solidFill>
+              </a:rPr>
               <a:t>•  OWASP Top 10 2021: &lt;https://owasp.org/Top10/&gt;</a:t>
             </a:r>
           </a:p>
@@ -3599,6 +3870,81 @@
           </a:p>
         </p:txBody>
       </p:sp>
+    </p:spTree>
+  </p:cSld>
+  <p:clrMapOvr>
+    <a:masterClrMapping/>
+  </p:clrMapOvr>
+</p:sld>
+</file>
+
+<file path=ppt/slides/slide15.xml><?xml version="1.0" encoding="utf-8"?>
+<p:sld xmlns:a="http://schemas.openxmlformats.org/drawingml/2006/main" xmlns:p="http://schemas.openxmlformats.org/presentationml/2006/main" xmlns:r="http://schemas.openxmlformats.org/officeDocument/2006/relationships">
+  <p:cSld>
+    <p:spTree>
+      <p:nvGrpSpPr>
+        <p:cNvPr id="1" name=""/>
+        <p:cNvGrpSpPr/>
+        <p:nvPr/>
+      </p:nvGrpSpPr>
+      <p:grpSpPr/>
+      <p:sp>
+        <p:nvSpPr>
+          <p:cNvPr id="2" name="TextBox 1"/>
+          <p:cNvSpPr txBox="1"/>
+          <p:nvPr/>
+        </p:nvSpPr>
+        <p:spPr>
+          <a:xfrm>
+            <a:off x="457200" y="274320"/>
+            <a:ext cx="8229600" cy="640080"/>
+          </a:xfrm>
+          <a:prstGeom prst="rect">
+            <a:avLst/>
+          </a:prstGeom>
+          <a:noFill/>
+        </p:spPr>
+        <p:txBody>
+          <a:bodyPr wrap="square">
+            <a:spAutoFit/>
+          </a:bodyPr>
+          <a:lstStyle/>
+          <a:p>
+            <a:r>
+              <a:rPr sz="2200" b="1">
+                <a:solidFill>
+                  <a:srgbClr val="0B3D2E"/>
+                </a:solidFill>
+              </a:rPr>
+              <a:t>Diagrama de la clase</a:t>
+            </a:r>
+          </a:p>
+        </p:txBody>
+      </p:sp>
+      <p:pic>
+        <p:nvPicPr>
+          <p:cNvPr id="3" name="Picture 2" descr="6e8a21aa63ec8879.png"/>
+          <p:cNvPicPr>
+            <a:picLocks noChangeAspect="1"/>
+          </p:cNvPicPr>
+          <p:nvPr/>
+        </p:nvPicPr>
+        <p:blipFill>
+          <a:blip r:embed="rId2"/>
+          <a:stretch>
+            <a:fillRect/>
+          </a:stretch>
+        </p:blipFill>
+        <p:spPr>
+          <a:xfrm>
+            <a:off x="2073718" y="1097280"/>
+            <a:ext cx="4996563" cy="5303520"/>
+          </a:xfrm>
+          <a:prstGeom prst="rect">
+            <a:avLst/>
+          </a:prstGeom>
+        </p:spPr>
+      </p:pic>
     </p:spTree>
   </p:cSld>
   <p:clrMapOvr>
@@ -3683,7 +4029,7 @@
                   <a:srgbClr val="22282E"/>
                 </a:solidFill>
               </a:rPr>
-              <a:t>•  Dominar el OWASP Top 10 (2021) como marco de referencia y taxonomía: qué representa cada categoría, cómo se relacionan entre sí y cómo usarlo para estructurar una auditoría web. Es el mapa que da nombre y contexto a todo lo que atacaremos en el resto de la parte.</a:t>
+              <a:t>•  Dominar el OWASP Top 10 (2021) como marco de referencia y taxonomía: qué representa cada categoría, cómo se relacionan entre sí y cómo usarlo para estructurar una auditoría web. Es el mapa que da…</a:t>
             </a:r>
           </a:p>
         </p:txBody>
@@ -4077,7 +4423,7 @@
                   <a:srgbClr val="0B3D2E"/>
                 </a:solidFill>
               </a:rPr>
-              <a:t>📖 Definiciones y características</a:t>
+              <a:t>🧠 Explicación en profundidad</a:t>
             </a:r>
           </a:p>
         </p:txBody>
@@ -4115,82 +4461,97 @@
                   <a:srgbClr val="22282E"/>
                 </a:solidFill>
               </a:rPr>
-              <a:t>•  OWASP Top 10: documento de concienciación con las 10 categorías de riesgo web más críticas. Característica: es un punto de partida, no una checklist completa.</a:t>
-            </a:r>
-          </a:p>
-          <a:p>
-            <a:pPr>
-              <a:spcAft>
-                <a:spcPts val="600"/>
-              </a:spcAft>
-            </a:pPr>
-            <a:r>
-              <a:rPr sz="1500">
-                <a:solidFill>
-                  <a:srgbClr val="22282E"/>
-                </a:solidFill>
-              </a:rPr>
-              <a:t>•  Categoría de riesgo: agrupación de vulnerabilidades por causa raíz común. Característica: una CWE puede caer en varias categorías.</a:t>
-            </a:r>
-          </a:p>
-          <a:p>
-            <a:pPr>
-              <a:spcAft>
-                <a:spcPts val="600"/>
-              </a:spcAft>
-            </a:pPr>
-            <a:r>
-              <a:rPr sz="1500">
-                <a:solidFill>
-                  <a:srgbClr val="22282E"/>
-                </a:solidFill>
-              </a:rPr>
-              <a:t>•  Broken Access Control (A01): usuarios acceden a datos/funciones fuera de sus permisos. Característica: subió al puesto 1 en 2021.</a:t>
-            </a:r>
-          </a:p>
-          <a:p>
-            <a:pPr>
-              <a:spcAft>
-                <a:spcPts val="600"/>
-              </a:spcAft>
-            </a:pPr>
-            <a:r>
-              <a:rPr sz="1500">
-                <a:solidFill>
-                  <a:srgbClr val="22282E"/>
-                </a:solidFill>
-              </a:rPr>
-              <a:t>•  Insecure Design (A04): fallo por diseño, no por implementación. Característica: no se corrige con un parche puntual.</a:t>
-            </a:r>
-          </a:p>
-          <a:p>
-            <a:pPr>
-              <a:spcAft>
-                <a:spcPts val="600"/>
-              </a:spcAft>
-            </a:pPr>
-            <a:r>
-              <a:rPr sz="1500">
-                <a:solidFill>
-                  <a:srgbClr val="22282E"/>
-                </a:solidFill>
-              </a:rPr>
-              <a:t>•  SSRF (A10): el servidor hace peticiones a destinos controlados por el atacante. Característica: entró como categoría propia por su relevancia en cloud.</a:t>
-            </a:r>
-          </a:p>
-          <a:p>
-            <a:pPr>
-              <a:spcAft>
-                <a:spcPts val="600"/>
-              </a:spcAft>
-            </a:pPr>
-            <a:r>
-              <a:rPr sz="1500">
-                <a:solidFill>
-                  <a:srgbClr val="22282E"/>
-                </a:solidFill>
-              </a:rPr>
-              <a:t>•  Riesgo = probabilidad × impacto: fórmula que OWASP usa para ordenar. Característica: guía la priorización, no la sustituye por criterio.</a:t>
+              <a:t>•  El OWASP Top 10 es el documento de referencia de la seguridad web: un consenso de la</a:t>
+            </a:r>
+          </a:p>
+          <a:p>
+            <a:pPr>
+              <a:spcAft>
+                <a:spcPts val="600"/>
+              </a:spcAft>
+            </a:pPr>
+            <a:r>
+              <a:rPr sz="1500">
+                <a:solidFill>
+                  <a:srgbClr val="22282E"/>
+                </a:solidFill>
+              </a:rPr>
+              <a:t>•  industria, revisado cada pocos años (la edición vigente es la de 2021), sobre las diez</a:t>
+            </a:r>
+          </a:p>
+          <a:p>
+            <a:pPr>
+              <a:spcAft>
+                <a:spcPts val="600"/>
+              </a:spcAft>
+            </a:pPr>
+            <a:r>
+              <a:rPr sz="1500">
+                <a:solidFill>
+                  <a:srgbClr val="22282E"/>
+                </a:solidFill>
+              </a:rPr>
+              <a:t>•  categorías de riesgo más críticas en aplicaciones web. Es importante entender qué es y</a:t>
+            </a:r>
+          </a:p>
+          <a:p>
+            <a:pPr>
+              <a:spcAft>
+                <a:spcPts val="600"/>
+              </a:spcAft>
+            </a:pPr>
+            <a:r>
+              <a:rPr sz="1500">
+                <a:solidFill>
+                  <a:srgbClr val="22282E"/>
+                </a:solidFill>
+              </a:rPr>
+              <a:t>•  qué no es. No es una lista de vulnerabilidades concretas ni un estándar de cumplimiento</a:t>
+            </a:r>
+          </a:p>
+          <a:p>
+            <a:pPr>
+              <a:spcAft>
+                <a:spcPts val="600"/>
+              </a:spcAft>
+            </a:pPr>
+            <a:r>
+              <a:rPr sz="1500">
+                <a:solidFill>
+                  <a:srgbClr val="22282E"/>
+                </a:solidFill>
+              </a:rPr>
+              <a:t>•  exhaustivo; es un instrumento de concienciación y priorización que agrupa fallos por su</a:t>
+            </a:r>
+          </a:p>
+          <a:p>
+            <a:pPr>
+              <a:spcAft>
+                <a:spcPts val="600"/>
+              </a:spcAft>
+            </a:pPr>
+            <a:r>
+              <a:rPr sz="1500">
+                <a:solidFill>
+                  <a:srgbClr val="22282E"/>
+                </a:solidFill>
+              </a:rPr>
+              <a:t>•  naturaleza. Su valor para esta parte es doble: ordena las 30 clases dándoles un marco común,</a:t>
+            </a:r>
+          </a:p>
+          <a:p>
+            <a:pPr>
+              <a:spcAft>
+                <a:spcPts val="600"/>
+              </a:spcAft>
+            </a:pPr>
+            <a:r>
+              <a:rPr sz="1500">
+                <a:solidFill>
+                  <a:srgbClr val="22282E"/>
+                </a:solidFill>
+              </a:rPr>
+              <a:t>•  y es el vocabulario con el que un informe de pentest web se comunica con desarrolladores y</a:t>
             </a:r>
           </a:p>
         </p:txBody>
@@ -4241,7 +4602,7 @@
                   <a:srgbClr val="0B3D2E"/>
                 </a:solidFill>
               </a:rPr>
-              <a:t>🧰 Herramientas y preparación</a:t>
+              <a:t>📖 Definiciones y características</a:t>
             </a:r>
           </a:p>
         </p:txBody>
@@ -4279,37 +4640,82 @@
                   <a:srgbClr val="22282E"/>
                 </a:solidFill>
               </a:rPr>
-              <a:t>•  Documento OWASP Top 10 2021 (online, gratuito).</a:t>
-            </a:r>
-          </a:p>
-          <a:p>
-            <a:pPr>
-              <a:spcAft>
-                <a:spcPts val="600"/>
-              </a:spcAft>
-            </a:pPr>
-            <a:r>
-              <a:rPr sz="1500">
-                <a:solidFill>
-                  <a:srgbClr val="22282E"/>
-                </a:solidFill>
-              </a:rPr>
-              <a:t>•  OWASP Juice Shop (cada reto está etiquetado con su categoría).</a:t>
-            </a:r>
-          </a:p>
-          <a:p>
-            <a:pPr>
-              <a:spcAft>
-                <a:spcPts val="600"/>
-              </a:spcAft>
-            </a:pPr>
-            <a:r>
-              <a:rPr sz="1500">
-                <a:solidFill>
-                  <a:srgbClr val="22282E"/>
-                </a:solidFill>
-              </a:rPr>
-              <a:t>•  Hoja de cálculo o plantilla para mapear hallazgos → categoría → severidad.</a:t>
+              <a:t>•  OWASP Top 10: documento de concienciación con las 10 categorías de riesgo web más críticas. Característica: es un punto de partida, no una checklist completa.</a:t>
+            </a:r>
+          </a:p>
+          <a:p>
+            <a:pPr>
+              <a:spcAft>
+                <a:spcPts val="600"/>
+              </a:spcAft>
+            </a:pPr>
+            <a:r>
+              <a:rPr sz="1500">
+                <a:solidFill>
+                  <a:srgbClr val="22282E"/>
+                </a:solidFill>
+              </a:rPr>
+              <a:t>•  Categoría de riesgo: agrupación de vulnerabilidades por causa raíz común. Característica: una CWE puede caer en varias categorías.</a:t>
+            </a:r>
+          </a:p>
+          <a:p>
+            <a:pPr>
+              <a:spcAft>
+                <a:spcPts val="600"/>
+              </a:spcAft>
+            </a:pPr>
+            <a:r>
+              <a:rPr sz="1500">
+                <a:solidFill>
+                  <a:srgbClr val="22282E"/>
+                </a:solidFill>
+              </a:rPr>
+              <a:t>•  Broken Access Control (A01): usuarios acceden a datos/funciones fuera de sus permisos. Característica: subió al puesto 1 en 2021.</a:t>
+            </a:r>
+          </a:p>
+          <a:p>
+            <a:pPr>
+              <a:spcAft>
+                <a:spcPts val="600"/>
+              </a:spcAft>
+            </a:pPr>
+            <a:r>
+              <a:rPr sz="1500">
+                <a:solidFill>
+                  <a:srgbClr val="22282E"/>
+                </a:solidFill>
+              </a:rPr>
+              <a:t>•  Insecure Design (A04): fallo por diseño, no por implementación. Característica: no se corrige con un parche puntual.</a:t>
+            </a:r>
+          </a:p>
+          <a:p>
+            <a:pPr>
+              <a:spcAft>
+                <a:spcPts val="600"/>
+              </a:spcAft>
+            </a:pPr>
+            <a:r>
+              <a:rPr sz="1500">
+                <a:solidFill>
+                  <a:srgbClr val="22282E"/>
+                </a:solidFill>
+              </a:rPr>
+              <a:t>•  SSRF (A10): el servidor hace peticiones a destinos controlados por el atacante. Característica: entró como categoría propia por su relevancia en cloud.</a:t>
+            </a:r>
+          </a:p>
+          <a:p>
+            <a:pPr>
+              <a:spcAft>
+                <a:spcPts val="600"/>
+              </a:spcAft>
+            </a:pPr>
+            <a:r>
+              <a:rPr sz="1500">
+                <a:solidFill>
+                  <a:srgbClr val="22282E"/>
+                </a:solidFill>
+              </a:rPr>
+              <a:t>•  Riesgo = probabilidad × impacto: fórmula que OWASP usa para ordenar. Característica: guía la priorización, no la sustituye por criterio.</a:t>
             </a:r>
           </a:p>
         </p:txBody>
@@ -4360,7 +4766,7 @@
                   <a:srgbClr val="0B3D2E"/>
                 </a:solidFill>
               </a:rPr>
-              <a:t>🧪 Laboratorio guiado</a:t>
+              <a:t>📔 Glosario</a:t>
             </a:r>
           </a:p>
         </p:txBody>
@@ -4398,97 +4804,97 @@
                   <a:srgbClr val="22282E"/>
                 </a:solidFill>
               </a:rPr>
-              <a:t>•  Abre el sitio oficial del Top 10 2021 y lee la ficha de cada categoría (A01–A10).</a:t>
-            </a:r>
-          </a:p>
-          <a:p>
-            <a:pPr>
-              <a:spcAft>
-                <a:spcPts val="600"/>
-              </a:spcAft>
-            </a:pPr>
-            <a:r>
-              <a:rPr sz="1500">
-                <a:solidFill>
-                  <a:srgbClr val="22282E"/>
-                </a:solidFill>
-              </a:rPr>
-              <a:t>•  Crea una tabla con columnas: categoría, ejemplo real, CWE asociada, control preventivo.</a:t>
-            </a:r>
-          </a:p>
-          <a:p>
-            <a:pPr>
-              <a:spcAft>
-                <a:spcPts val="600"/>
-              </a:spcAft>
-            </a:pPr>
-            <a:r>
-              <a:rPr sz="1500">
-                <a:solidFill>
-                  <a:srgbClr val="22282E"/>
-                </a:solidFill>
-              </a:rPr>
-              <a:t>•  En Juice Shop, abre el Score Board (/#/score-board) y filtra retos por categoría.</a:t>
-            </a:r>
-          </a:p>
-          <a:p>
-            <a:pPr>
-              <a:spcAft>
-                <a:spcPts val="600"/>
-              </a:spcAft>
-            </a:pPr>
-            <a:r>
-              <a:rPr sz="1500">
-                <a:solidFill>
-                  <a:srgbClr val="22282E"/>
-                </a:solidFill>
-              </a:rPr>
-              <a:t>•  Elige 5 retos de categorías distintas y anota a qué A0X pertenecen y por qué.</a:t>
-            </a:r>
-          </a:p>
-          <a:p>
-            <a:pPr>
-              <a:spcAft>
-                <a:spcPts val="600"/>
-              </a:spcAft>
-            </a:pPr>
-            <a:r>
-              <a:rPr sz="1500">
-                <a:solidFill>
-                  <a:srgbClr val="22282E"/>
-                </a:solidFill>
-              </a:rPr>
-              <a:t>•  Para cada uno, redacta en una frase el impacto de negocio si se explotara.</a:t>
-            </a:r>
-          </a:p>
-          <a:p>
-            <a:pPr>
-              <a:spcAft>
-                <a:spcPts val="600"/>
-              </a:spcAft>
-            </a:pPr>
-            <a:r>
-              <a:rPr sz="1500">
-                <a:solidFill>
-                  <a:srgbClr val="22282E"/>
-                </a:solidFill>
-              </a:rPr>
-              <a:t>•  Ordena tus 5 hallazgos hipotéticos por riesgo (probabilidad × impacto) y justifica.</a:t>
-            </a:r>
-          </a:p>
-          <a:p>
-            <a:pPr>
-              <a:spcAft>
-                <a:spcPts val="600"/>
-              </a:spcAft>
-            </a:pPr>
-            <a:r>
-              <a:rPr sz="1500">
-                <a:solidFill>
-                  <a:srgbClr val="22282E"/>
-                </a:solidFill>
-              </a:rPr>
-              <a:t>•  Compara tu orden con la severidad que sugiere el propio reto.</a:t>
+              <a:t>•  Término — Definición concisa</a:t>
+            </a:r>
+          </a:p>
+          <a:p>
+            <a:pPr>
+              <a:spcAft>
+                <a:spcPts val="600"/>
+              </a:spcAft>
+            </a:pPr>
+            <a:r>
+              <a:rPr sz="1500">
+                <a:solidFill>
+                  <a:srgbClr val="22282E"/>
+                </a:solidFill>
+              </a:rPr>
+              <a:t>•  OWASP Top 10 — Consenso de las diez categorías de riesgo web más críticas</a:t>
+            </a:r>
+          </a:p>
+          <a:p>
+            <a:pPr>
+              <a:spcAft>
+                <a:spcPts val="600"/>
+              </a:spcAft>
+            </a:pPr>
+            <a:r>
+              <a:rPr sz="1500">
+                <a:solidFill>
+                  <a:srgbClr val="22282E"/>
+                </a:solidFill>
+              </a:rPr>
+              <a:t>•  Categoría de riesgo — Agrupación de fallos por naturaleza, no un bug concreto</a:t>
+            </a:r>
+          </a:p>
+          <a:p>
+            <a:pPr>
+              <a:spcAft>
+                <a:spcPts val="600"/>
+              </a:spcAft>
+            </a:pPr>
+            <a:r>
+              <a:rPr sz="1500">
+                <a:solidFill>
+                  <a:srgbClr val="22282E"/>
+                </a:solidFill>
+              </a:rPr>
+              <a:t>•  Prevalencia — Con qué frecuencia aparece un fallo en aplicaciones reales</a:t>
+            </a:r>
+          </a:p>
+          <a:p>
+            <a:pPr>
+              <a:spcAft>
+                <a:spcPts val="600"/>
+              </a:spcAft>
+            </a:pPr>
+            <a:r>
+              <a:rPr sz="1500">
+                <a:solidFill>
+                  <a:srgbClr val="22282E"/>
+                </a:solidFill>
+              </a:rPr>
+              <a:t>•  A01 Broken Access Control — Acceder a lo que no corresponde; el nº1 de 2021</a:t>
+            </a:r>
+          </a:p>
+          <a:p>
+            <a:pPr>
+              <a:spcAft>
+                <a:spcPts val="600"/>
+              </a:spcAft>
+            </a:pPr>
+            <a:r>
+              <a:rPr sz="1500">
+                <a:solidFill>
+                  <a:srgbClr val="22282E"/>
+                </a:solidFill>
+              </a:rPr>
+              <a:t>•  A02 Cryptographic Failures — Datos sensibles mal protegidos</a:t>
+            </a:r>
+          </a:p>
+          <a:p>
+            <a:pPr>
+              <a:spcAft>
+                <a:spcPts val="600"/>
+              </a:spcAft>
+            </a:pPr>
+            <a:r>
+              <a:rPr sz="1500">
+                <a:solidFill>
+                  <a:srgbClr val="22282E"/>
+                </a:solidFill>
+              </a:rPr>
+              <a:t>•  A03 Injection — Datos interpretados como código; incluye XSS desde 2021</a:t>
             </a:r>
           </a:p>
         </p:txBody>
@@ -4539,7 +4945,7 @@
                   <a:srgbClr val="0B3D2E"/>
                 </a:solidFill>
               </a:rPr>
-              <a:t>✍️ Ejercicios</a:t>
+              <a:t>🧰 Herramientas y preparación</a:t>
             </a:r>
           </a:p>
         </p:txBody>
@@ -4577,82 +4983,37 @@
                   <a:srgbClr val="22282E"/>
                 </a:solidFill>
               </a:rPr>
-              <a:t>•  Asocia cada una de estas CWE a su categoría: CWE-89, CWE-79, CWE-352, CWE-918, CWE-611.</a:t>
-            </a:r>
-          </a:p>
-          <a:p>
-            <a:pPr>
-              <a:spcAft>
-                <a:spcPts val="600"/>
-              </a:spcAft>
-            </a:pPr>
-            <a:r>
-              <a:rPr sz="1500">
-                <a:solidFill>
-                  <a:srgbClr val="22282E"/>
-                </a:solidFill>
-              </a:rPr>
-              <a:t>•  Explica por qué "Injection" absorbió a XSS en 2021.</a:t>
-            </a:r>
-          </a:p>
-          <a:p>
-            <a:pPr>
-              <a:spcAft>
-                <a:spcPts val="600"/>
-              </a:spcAft>
-            </a:pPr>
-            <a:r>
-              <a:rPr sz="1500">
-                <a:solidFill>
-                  <a:srgbClr val="22282E"/>
-                </a:solidFill>
-              </a:rPr>
-              <a:t>•  Da un ejemplo propio de Insecure Design que no sea un bug de código.</a:t>
-            </a:r>
-          </a:p>
-          <a:p>
-            <a:pPr>
-              <a:spcAft>
-                <a:spcPts val="600"/>
-              </a:spcAft>
-            </a:pPr>
-            <a:r>
-              <a:rPr sz="1500">
-                <a:solidFill>
-                  <a:srgbClr val="22282E"/>
-                </a:solidFill>
-              </a:rPr>
-              <a:t>•  Diferencia A05 (misconfiguration) de A06 (componentes vulnerables) con un caso.</a:t>
-            </a:r>
-          </a:p>
-          <a:p>
-            <a:pPr>
-              <a:spcAft>
-                <a:spcPts val="600"/>
-              </a:spcAft>
-            </a:pPr>
-            <a:r>
-              <a:rPr sz="1500">
-                <a:solidFill>
-                  <a:srgbClr val="22282E"/>
-                </a:solidFill>
-              </a:rPr>
-              <a:t>•  Justifica por qué Broken Access Control encabeza la lista.</a:t>
-            </a:r>
-          </a:p>
-          <a:p>
-            <a:pPr>
-              <a:spcAft>
-                <a:spcPts val="600"/>
-              </a:spcAft>
-            </a:pPr>
-            <a:r>
-              <a:rPr sz="1500">
-                <a:solidFill>
-                  <a:srgbClr val="22282E"/>
-                </a:solidFill>
-              </a:rPr>
-              <a:t>•  Propón un control preventivo para cada categoría del Top 10.</a:t>
+              <a:t>•  Documento OWASP Top 10 2021 (online, gratuito).</a:t>
+            </a:r>
+          </a:p>
+          <a:p>
+            <a:pPr>
+              <a:spcAft>
+                <a:spcPts val="600"/>
+              </a:spcAft>
+            </a:pPr>
+            <a:r>
+              <a:rPr sz="1500">
+                <a:solidFill>
+                  <a:srgbClr val="22282E"/>
+                </a:solidFill>
+              </a:rPr>
+              <a:t>•  OWASP Juice Shop (cada reto está etiquetado con su categoría).</a:t>
+            </a:r>
+          </a:p>
+          <a:p>
+            <a:pPr>
+              <a:spcAft>
+                <a:spcPts val="600"/>
+              </a:spcAft>
+            </a:pPr>
+            <a:r>
+              <a:rPr sz="1500">
+                <a:solidFill>
+                  <a:srgbClr val="22282E"/>
+                </a:solidFill>
+              </a:rPr>
+              <a:t>•  Hoja de cálculo o plantilla para mapear hallazgos → categoría → severidad.</a:t>
             </a:r>
           </a:p>
         </p:txBody>
@@ -4703,7 +5064,7 @@
                   <a:srgbClr val="0B3D2E"/>
                 </a:solidFill>
               </a:rPr>
-              <a:t>📝 Reto verificable</a:t>
+              <a:t>🧪 Laboratorio guiado</a:t>
             </a:r>
           </a:p>
         </p:txBody>
@@ -4741,22 +5102,97 @@
                   <a:srgbClr val="22282E"/>
                 </a:solidFill>
               </a:rPr>
-              <a:t>•  Entrega una matriz Top 10 con las 10 categorías, un ejemplo concreto por cada una, su CWE principal y un control de mitigación.</a:t>
-            </a:r>
-          </a:p>
-          <a:p>
-            <a:pPr>
-              <a:spcAft>
-                <a:spcPts val="600"/>
-              </a:spcAft>
-            </a:pPr>
-            <a:r>
-              <a:rPr sz="1500">
-                <a:solidFill>
-                  <a:srgbClr val="22282E"/>
-                </a:solidFill>
-              </a:rPr>
-              <a:t>•  Criterio de aceptación: las 10 categorías están cubiertas, los ejemplos son distintos y realistas, y cada control mitiga la causa raíz (no solo el síntoma).</a:t>
+              <a:t>•  Abre el sitio oficial del Top 10 2021 y lee la ficha de cada categoría (A01–A10).</a:t>
+            </a:r>
+          </a:p>
+          <a:p>
+            <a:pPr>
+              <a:spcAft>
+                <a:spcPts val="600"/>
+              </a:spcAft>
+            </a:pPr>
+            <a:r>
+              <a:rPr sz="1500">
+                <a:solidFill>
+                  <a:srgbClr val="22282E"/>
+                </a:solidFill>
+              </a:rPr>
+              <a:t>•  Crea una tabla con columnas: categoría, ejemplo real, CWE asociada, control preventivo.</a:t>
+            </a:r>
+          </a:p>
+          <a:p>
+            <a:pPr>
+              <a:spcAft>
+                <a:spcPts val="600"/>
+              </a:spcAft>
+            </a:pPr>
+            <a:r>
+              <a:rPr sz="1500">
+                <a:solidFill>
+                  <a:srgbClr val="22282E"/>
+                </a:solidFill>
+              </a:rPr>
+              <a:t>•  En Juice Shop, abre el Score Board (/#/score-board) y filtra retos por categoría.</a:t>
+            </a:r>
+          </a:p>
+          <a:p>
+            <a:pPr>
+              <a:spcAft>
+                <a:spcPts val="600"/>
+              </a:spcAft>
+            </a:pPr>
+            <a:r>
+              <a:rPr sz="1500">
+                <a:solidFill>
+                  <a:srgbClr val="22282E"/>
+                </a:solidFill>
+              </a:rPr>
+              <a:t>•  Elige 5 retos de categorías distintas y anota a qué A0X pertenecen y por qué.</a:t>
+            </a:r>
+          </a:p>
+          <a:p>
+            <a:pPr>
+              <a:spcAft>
+                <a:spcPts val="600"/>
+              </a:spcAft>
+            </a:pPr>
+            <a:r>
+              <a:rPr sz="1500">
+                <a:solidFill>
+                  <a:srgbClr val="22282E"/>
+                </a:solidFill>
+              </a:rPr>
+              <a:t>•  Para cada uno, redacta en una frase el impacto de negocio si se explotara.</a:t>
+            </a:r>
+          </a:p>
+          <a:p>
+            <a:pPr>
+              <a:spcAft>
+                <a:spcPts val="600"/>
+              </a:spcAft>
+            </a:pPr>
+            <a:r>
+              <a:rPr sz="1500">
+                <a:solidFill>
+                  <a:srgbClr val="22282E"/>
+                </a:solidFill>
+              </a:rPr>
+              <a:t>•  Ordena tus 5 hallazgos hipotéticos por riesgo (probabilidad × impacto) y justifica.</a:t>
+            </a:r>
+          </a:p>
+          <a:p>
+            <a:pPr>
+              <a:spcAft>
+                <a:spcPts val="600"/>
+              </a:spcAft>
+            </a:pPr>
+            <a:r>
+              <a:rPr sz="1500">
+                <a:solidFill>
+                  <a:srgbClr val="22282E"/>
+                </a:solidFill>
+              </a:rPr>
+              <a:t>•  Compara tu orden con la severidad que sugiere el propio reto.</a:t>
             </a:r>
           </a:p>
         </p:txBody>
